--- a/Delin Mattéo Grosjean Violette Présentation_COO.pptx
+++ b/Delin Mattéo Grosjean Violette Présentation_COO.pptx
@@ -4323,7 +4323,13 @@
       </p:sp>
       <p:pic>
         <p:nvPicPr>
-          <p:cNvPr id="4" name="Image 0" descr="preencoded.png"/>
+          <p:cNvPr id="6" name="Image 5">
+            <a:extLst>
+              <a:ext uri="{FF2B5EF4-FFF2-40B4-BE49-F238E27FC236}">
+                <a16:creationId xmlns:a16="http://schemas.microsoft.com/office/drawing/2014/main" id="{9051765B-36E8-45CF-8E03-7EB69B293774}"/>
+              </a:ext>
+            </a:extLst>
+          </p:cNvPr>
           <p:cNvPicPr>
             <a:picLocks noChangeAspect="1"/>
           </p:cNvPicPr>
@@ -4337,8 +4343,8 @@
         </p:blipFill>
         <p:spPr>
           <a:xfrm>
-            <a:off x="365760" y="1005840"/>
-            <a:ext cx="8412480" cy="3840480"/>
+            <a:off x="0" y="914400"/>
+            <a:ext cx="9144000" cy="4163786"/>
           </a:xfrm>
           <a:prstGeom prst="rect">
             <a:avLst/>
@@ -4640,9 +4646,54 @@
           </a:p>
         </p:txBody>
       </p:sp>
+      <p:sp>
+        <p:nvSpPr>
+          <p:cNvPr id="5" name="Text 2"/>
+          <p:cNvSpPr/>
+          <p:nvPr/>
+        </p:nvSpPr>
+        <p:spPr>
+          <a:xfrm>
+            <a:off x="457200" y="4798846"/>
+            <a:ext cx="8229600" cy="274320"/>
+          </a:xfrm>
+          <a:prstGeom prst="rect">
+            <a:avLst/>
+          </a:prstGeom>
+          <a:noFill/>
+          <a:ln/>
+        </p:spPr>
+        <p:txBody>
+          <a:bodyPr wrap="square" rtlCol="0" anchor="ctr"/>
+          <a:lstStyle/>
+          <a:p>
+            <a:pPr marL="0" indent="0" algn="ctr">
+              <a:buNone/>
+            </a:pPr>
+            <a:r>
+              <a:rPr lang="en-US" sz="1100" i="1" dirty="0">
+                <a:solidFill>
+                  <a:srgbClr val="64748B"/>
+                </a:solidFill>
+                <a:latin typeface="Calibri" pitchFamily="34" charset="0"/>
+                <a:ea typeface="Calibri" pitchFamily="34" charset="-122"/>
+                <a:cs typeface="Calibri" pitchFamily="34" charset="-120"/>
+              </a:rPr>
+              <a:t>Acteur unique · 3 groupes de cas (Utilisateur, Ressources, Reservations)</a:t>
+            </a:r>
+            <a:endParaRPr lang="en-US" sz="1100" dirty="0"/>
+          </a:p>
+        </p:txBody>
+      </p:sp>
       <p:pic>
         <p:nvPicPr>
-          <p:cNvPr id="4" name="Image 0" descr="preencoded.png"/>
+          <p:cNvPr id="7" name="Image 6">
+            <a:extLst>
+              <a:ext uri="{FF2B5EF4-FFF2-40B4-BE49-F238E27FC236}">
+                <a16:creationId xmlns:a16="http://schemas.microsoft.com/office/drawing/2014/main" id="{5E8B22B1-A73D-4D39-969B-21F77FAA1251}"/>
+              </a:ext>
+            </a:extLst>
+          </p:cNvPr>
           <p:cNvPicPr>
             <a:picLocks noChangeAspect="1"/>
           </p:cNvPicPr>
@@ -4656,53 +4707,14 @@
         </p:blipFill>
         <p:spPr>
           <a:xfrm>
-            <a:off x="274320" y="960120"/>
-            <a:ext cx="8595360" cy="3931920"/>
+            <a:off x="2305251" y="1086373"/>
+            <a:ext cx="4533497" cy="3610834"/>
           </a:xfrm>
           <a:prstGeom prst="rect">
             <a:avLst/>
           </a:prstGeom>
         </p:spPr>
       </p:pic>
-      <p:sp>
-        <p:nvSpPr>
-          <p:cNvPr id="5" name="Text 2"/>
-          <p:cNvSpPr/>
-          <p:nvPr/>
-        </p:nvSpPr>
-        <p:spPr>
-          <a:xfrm>
-            <a:off x="457200" y="4869180"/>
-            <a:ext cx="8229600" cy="274320"/>
-          </a:xfrm>
-          <a:prstGeom prst="rect">
-            <a:avLst/>
-          </a:prstGeom>
-          <a:noFill/>
-          <a:ln/>
-        </p:spPr>
-        <p:txBody>
-          <a:bodyPr wrap="square" rtlCol="0" anchor="ctr"/>
-          <a:lstStyle/>
-          <a:p>
-            <a:pPr marL="0" indent="0" algn="ctr">
-              <a:buNone/>
-            </a:pPr>
-            <a:r>
-              <a:rPr lang="en-US" sz="1100" i="1" dirty="0">
-                <a:solidFill>
-                  <a:srgbClr val="64748B"/>
-                </a:solidFill>
-                <a:latin typeface="Calibri" pitchFamily="34" charset="0"/>
-                <a:ea typeface="Calibri" pitchFamily="34" charset="-122"/>
-                <a:cs typeface="Calibri" pitchFamily="34" charset="-120"/>
-              </a:rPr>
-              <a:t>Acteur unique · 3 groupes de cas (Utilisateur, Ressources, Reservations)</a:t>
-            </a:r>
-            <a:endParaRPr lang="en-US" sz="1100" dirty="0"/>
-          </a:p>
-        </p:txBody>
-      </p:sp>
     </p:spTree>
   </p:cSld>
   <p:clrMapOvr>
